--- a/publication/PAKDD2026_AI_forum.pptx
+++ b/publication/PAKDD2026_AI_forum.pptx
@@ -128,12 +128,20 @@
 </p:presentation>
 </file>
 
+<file path=ppt/revisionInfo.xml><?xml version="1.0" encoding="utf-8"?>
+<p1510:revInfo xmlns:a="http://schemas.openxmlformats.org/drawingml/2006/main" xmlns:r="http://schemas.openxmlformats.org/officeDocument/2006/relationships" xmlns:p1510="http://schemas.microsoft.com/office/powerpoint/2015/10/main">
+  <p1510:revLst>
+    <p1510:client id="{D3F187A2-46EC-4E26-B22E-4E263A09E9EA}" v="5" dt="2026-06-08T14:49:19.115"/>
+  </p1510:revLst>
+</p1510:revInfo>
+</file>
+
 <file path=ppt/changesInfos/changesInfo1.xml><?xml version="1.0" encoding="utf-8"?>
 <pc:chgInfo xmlns:a="http://schemas.openxmlformats.org/drawingml/2006/main" xmlns:r="http://schemas.openxmlformats.org/officeDocument/2006/relationships" xmlns:ac="http://schemas.microsoft.com/office/drawing/2013/main/command" xmlns:pc="http://schemas.microsoft.com/office/powerpoint/2013/main/command">
   <pc:docChgLst>
     <pc:chgData name="Tsz Nam Chan" userId="d72bc0ce159372cc" providerId="LiveId" clId="{7EA772CB-F43F-45EA-8D4F-488304E9E5E6}"/>
     <pc:docChg chg="modSld">
-      <pc:chgData name="Tsz Nam Chan" userId="d72bc0ce159372cc" providerId="LiveId" clId="{7EA772CB-F43F-45EA-8D4F-488304E9E5E6}" dt="2026-06-06T10:01:55.221" v="7" actId="20577"/>
+      <pc:chgData name="Tsz Nam Chan" userId="d72bc0ce159372cc" providerId="LiveId" clId="{7EA772CB-F43F-45EA-8D4F-488304E9E5E6}" dt="2026-06-08T14:50:00.523" v="44" actId="1036"/>
       <pc:docMkLst>
         <pc:docMk/>
       </pc:docMkLst>
@@ -149,6 +157,37 @@
             <pc:docMk/>
             <pc:sldMk cId="1760263525" sldId="258"/>
             <ac:spMk id="3" creationId="{98F2C3F1-ED2A-4EB1-568F-3F984D4DF7A0}"/>
+          </ac:spMkLst>
+        </pc:spChg>
+      </pc:sldChg>
+      <pc:sldChg chg="addSp modSp mod">
+        <pc:chgData name="Tsz Nam Chan" userId="d72bc0ce159372cc" providerId="LiveId" clId="{7EA772CB-F43F-45EA-8D4F-488304E9E5E6}" dt="2026-06-08T14:50:00.523" v="44" actId="1036"/>
+        <pc:sldMkLst>
+          <pc:docMk/>
+          <pc:sldMk cId="2252278989" sldId="263"/>
+        </pc:sldMkLst>
+        <pc:spChg chg="mod">
+          <ac:chgData name="Tsz Nam Chan" userId="d72bc0ce159372cc" providerId="LiveId" clId="{7EA772CB-F43F-45EA-8D4F-488304E9E5E6}" dt="2026-06-08T14:46:32.107" v="12" actId="20577"/>
+          <ac:spMkLst>
+            <pc:docMk/>
+            <pc:sldMk cId="2252278989" sldId="263"/>
+            <ac:spMk id="3" creationId="{01B8AD9E-EFD1-D615-C2C7-DD3B28751642}"/>
+          </ac:spMkLst>
+        </pc:spChg>
+        <pc:spChg chg="mod">
+          <ac:chgData name="Tsz Nam Chan" userId="d72bc0ce159372cc" providerId="LiveId" clId="{7EA772CB-F43F-45EA-8D4F-488304E9E5E6}" dt="2026-06-08T14:49:30.841" v="37" actId="1076"/>
+          <ac:spMkLst>
+            <pc:docMk/>
+            <pc:sldMk cId="2252278989" sldId="263"/>
+            <ac:spMk id="7" creationId="{D885DD16-A961-49FA-66D5-AC591210494F}"/>
+          </ac:spMkLst>
+        </pc:spChg>
+        <pc:spChg chg="add mod">
+          <ac:chgData name="Tsz Nam Chan" userId="d72bc0ce159372cc" providerId="LiveId" clId="{7EA772CB-F43F-45EA-8D4F-488304E9E5E6}" dt="2026-06-08T14:50:00.523" v="44" actId="1036"/>
+          <ac:spMkLst>
+            <pc:docMk/>
+            <pc:sldMk cId="2252278989" sldId="263"/>
+            <ac:spMk id="8" creationId="{704B36DB-8E57-5FBB-1905-DDDA52FA9495}"/>
           </ac:spMkLst>
         </pc:spChg>
       </pc:sldChg>
@@ -239,7 +278,7 @@
           <a:p>
             <a:fld id="{1A3C91AF-9F28-49A2-BFC3-7675F98BA614}" type="datetimeFigureOut">
               <a:rPr lang="zh-Hans-HK" altLang="en-US" smtClean="0"/>
-              <a:t>6/6/2026</a:t>
+              <a:t>8/6/2026</a:t>
             </a:fld>
             <a:endParaRPr lang="zh-Hans-HK" altLang="en-US"/>
           </a:p>
@@ -656,7 +695,7 @@
           <a:p>
             <a:fld id="{54E0C794-3470-48E0-B0C6-264A2FA0D963}" type="datetime1">
               <a:rPr lang="zh-Hans-HK" altLang="en-US" smtClean="0"/>
-              <a:t>6/6/2026</a:t>
+              <a:t>8/6/2026</a:t>
             </a:fld>
             <a:endParaRPr lang="zh-Hans-HK" altLang="en-US"/>
           </a:p>
@@ -856,7 +895,7 @@
           <a:p>
             <a:fld id="{FE3C50F4-7E13-47EC-B2D2-1638E2E43CF8}" type="datetime1">
               <a:rPr lang="zh-Hans-HK" altLang="en-US" smtClean="0"/>
-              <a:t>6/6/2026</a:t>
+              <a:t>8/6/2026</a:t>
             </a:fld>
             <a:endParaRPr lang="zh-Hans-HK" altLang="en-US"/>
           </a:p>
@@ -1066,7 +1105,7 @@
           <a:p>
             <a:fld id="{6A2E3D6D-77D1-4039-B981-8F2B223096F5}" type="datetime1">
               <a:rPr lang="zh-Hans-HK" altLang="en-US" smtClean="0"/>
-              <a:t>6/6/2026</a:t>
+              <a:t>8/6/2026</a:t>
             </a:fld>
             <a:endParaRPr lang="zh-Hans-HK" altLang="en-US"/>
           </a:p>
@@ -1266,7 +1305,7 @@
           <a:p>
             <a:fld id="{C5C4515F-5DD3-4FBE-B6FB-AB66A13EFFF7}" type="datetime1">
               <a:rPr lang="zh-Hans-HK" altLang="en-US" smtClean="0"/>
-              <a:t>6/6/2026</a:t>
+              <a:t>8/6/2026</a:t>
             </a:fld>
             <a:endParaRPr lang="zh-Hans-HK" altLang="en-US"/>
           </a:p>
@@ -1542,7 +1581,7 @@
           <a:p>
             <a:fld id="{CF02AFC3-5C1F-49A7-B42D-7CD83CC88B82}" type="datetime1">
               <a:rPr lang="zh-Hans-HK" altLang="en-US" smtClean="0"/>
-              <a:t>6/6/2026</a:t>
+              <a:t>8/6/2026</a:t>
             </a:fld>
             <a:endParaRPr lang="zh-Hans-HK" altLang="en-US"/>
           </a:p>
@@ -1810,7 +1849,7 @@
           <a:p>
             <a:fld id="{84BE3002-E7A5-4054-9722-F255E20ED5EA}" type="datetime1">
               <a:rPr lang="zh-Hans-HK" altLang="en-US" smtClean="0"/>
-              <a:t>6/6/2026</a:t>
+              <a:t>8/6/2026</a:t>
             </a:fld>
             <a:endParaRPr lang="zh-Hans-HK" altLang="en-US"/>
           </a:p>
@@ -2225,7 +2264,7 @@
           <a:p>
             <a:fld id="{7DAAC1D1-D94A-4568-91D0-707D26886006}" type="datetime1">
               <a:rPr lang="zh-Hans-HK" altLang="en-US" smtClean="0"/>
-              <a:t>6/6/2026</a:t>
+              <a:t>8/6/2026</a:t>
             </a:fld>
             <a:endParaRPr lang="zh-Hans-HK" altLang="en-US"/>
           </a:p>
@@ -2367,7 +2406,7 @@
           <a:p>
             <a:fld id="{8DC8B88D-7EAA-4DAA-BD0A-E2FF1BA57DA8}" type="datetime1">
               <a:rPr lang="zh-Hans-HK" altLang="en-US" smtClean="0"/>
-              <a:t>6/6/2026</a:t>
+              <a:t>8/6/2026</a:t>
             </a:fld>
             <a:endParaRPr lang="zh-Hans-HK" altLang="en-US"/>
           </a:p>
@@ -2480,7 +2519,7 @@
           <a:p>
             <a:fld id="{14EC85CD-36B8-4314-A904-3875D306522F}" type="datetime1">
               <a:rPr lang="zh-Hans-HK" altLang="en-US" smtClean="0"/>
-              <a:t>6/6/2026</a:t>
+              <a:t>8/6/2026</a:t>
             </a:fld>
             <a:endParaRPr lang="zh-Hans-HK" altLang="en-US"/>
           </a:p>
@@ -2793,7 +2832,7 @@
           <a:p>
             <a:fld id="{0D3093B5-DDA2-43E8-A9C8-854E2431F026}" type="datetime1">
               <a:rPr lang="zh-Hans-HK" altLang="en-US" smtClean="0"/>
-              <a:t>6/6/2026</a:t>
+              <a:t>8/6/2026</a:t>
             </a:fld>
             <a:endParaRPr lang="zh-Hans-HK" altLang="en-US"/>
           </a:p>
@@ -3082,7 +3121,7 @@
           <a:p>
             <a:fld id="{A6E35A93-BAA5-4063-B221-8A076676CB68}" type="datetime1">
               <a:rPr lang="zh-Hans-HK" altLang="en-US" smtClean="0"/>
-              <a:t>6/6/2026</a:t>
+              <a:t>8/6/2026</a:t>
             </a:fld>
             <a:endParaRPr lang="zh-Hans-HK" altLang="en-US"/>
           </a:p>
@@ -3325,7 +3364,7 @@
           <a:p>
             <a:fld id="{6B4C9CAF-7C78-4DCA-888D-9FD268ECC897}" type="datetime1">
               <a:rPr lang="zh-Hans-HK" altLang="en-US" smtClean="0"/>
-              <a:t>6/6/2026</a:t>
+              <a:t>8/6/2026</a:t>
             </a:fld>
             <a:endParaRPr lang="zh-Hans-HK" altLang="en-US"/>
           </a:p>
@@ -9886,8 +9925,8 @@
           </a:p>
         </p:txBody>
       </p:sp>
-      <mc:AlternateContent xmlns:mc="http://schemas.openxmlformats.org/markup-compatibility/2006" xmlns:a14="http://schemas.microsoft.com/office/drawing/2010/main">
-        <mc:Choice Requires="a14">
+      <mc:AlternateContent xmlns:mc="http://schemas.openxmlformats.org/markup-compatibility/2006">
+        <mc:Choice xmlns:a14="http://schemas.microsoft.com/office/drawing/2010/main" Requires="a14">
           <p:sp>
             <p:nvSpPr>
               <p:cNvPr id="3" name="Content Placeholder 2">
@@ -10219,21 +10258,7 @@
                         <a:latin typeface="Cambria Math" panose="02040503050406030204" pitchFamily="18" charset="0"/>
                         <a:cs typeface="Times New Roman" panose="02020603050405020304" pitchFamily="18" charset="0"/>
                       </a:rPr>
-                      <m:t>𝑋𝑌</m:t>
-                    </m:r>
-                    <m:r>
-                      <a:rPr lang="en-HK" altLang="zh-Hans-HK" b="0" i="1" smtClean="0">
-                        <a:latin typeface="Cambria Math" panose="02040503050406030204" pitchFamily="18" charset="0"/>
-                        <a:cs typeface="Times New Roman" panose="02020603050405020304" pitchFamily="18" charset="0"/>
-                      </a:rPr>
-                      <m:t>(</m:t>
-                    </m:r>
-                    <m:r>
-                      <a:rPr lang="en-HK" altLang="zh-Hans-HK" b="0" i="1" smtClean="0">
-                        <a:latin typeface="Cambria Math" panose="02040503050406030204" pitchFamily="18" charset="0"/>
-                        <a:cs typeface="Times New Roman" panose="02020603050405020304" pitchFamily="18" charset="0"/>
-                      </a:rPr>
-                      <m:t>𝑇</m:t>
+                      <m:t>𝑋𝑌𝑇</m:t>
                     </m:r>
                     <m:r>
                       <a:rPr lang="en-HK" altLang="zh-Hans-HK" b="0" i="1" smtClean="0">
@@ -10247,6 +10272,13 @@
                         <a:latin typeface="Cambria Math" panose="02040503050406030204" pitchFamily="18" charset="0"/>
                         <a:cs typeface="Times New Roman" panose="02020603050405020304" pitchFamily="18" charset="0"/>
                       </a:rPr>
+                      <m:t>𝑌</m:t>
+                    </m:r>
+                    <m:r>
+                      <a:rPr lang="en-HK" altLang="zh-Hans-HK" b="0" i="1" smtClean="0">
+                        <a:latin typeface="Cambria Math" panose="02040503050406030204" pitchFamily="18" charset="0"/>
+                        <a:cs typeface="Times New Roman" panose="02020603050405020304" pitchFamily="18" charset="0"/>
+                      </a:rPr>
                       <m:t>𝑛</m:t>
                     </m:r>
                     <m:r>
@@ -10254,7 +10286,7 @@
                         <a:latin typeface="Cambria Math" panose="02040503050406030204" pitchFamily="18" charset="0"/>
                         <a:cs typeface="Times New Roman" panose="02020603050405020304" pitchFamily="18" charset="0"/>
                       </a:rPr>
-                      <m:t>))</m:t>
+                      <m:t>)</m:t>
                     </m:r>
                   </m:oMath>
                 </a14:m>
@@ -10293,7 +10325,7 @@
             </p:txBody>
           </p:sp>
         </mc:Choice>
-        <mc:Fallback xmlns="">
+        <mc:Fallback>
           <p:sp>
             <p:nvSpPr>
               <p:cNvPr id="3" name="Content Placeholder 2">
@@ -10318,7 +10350,7 @@
               <a:blipFill>
                 <a:blip r:embed="rId2"/>
                 <a:stretch>
-                  <a:fillRect l="-2032" t="-2381" b="-700"/>
+                  <a:fillRect l="-2032" t="-2381" r="-1580" b="-700"/>
                 </a:stretch>
               </a:blipFill>
             </p:spPr>
@@ -10910,7 +10942,12 @@
             <p:ph type="sldNum" sz="quarter" idx="12"/>
           </p:nvPr>
         </p:nvSpPr>
-        <p:spPr/>
+        <p:spPr>
+          <a:xfrm>
+            <a:off x="9391245" y="6587540"/>
+            <a:ext cx="2743200" cy="365125"/>
+          </a:xfrm>
+        </p:spPr>
         <p:txBody>
           <a:bodyPr/>
           <a:lstStyle/>
@@ -10919,7 +10956,114 @@
               <a:rPr lang="zh-Hans-HK" altLang="en-US" smtClean="0"/>
               <a:t>9</a:t>
             </a:fld>
-            <a:endParaRPr lang="zh-Hans-HK" altLang="en-US"/>
+            <a:endParaRPr lang="zh-Hans-HK" altLang="en-US" dirty="0"/>
+          </a:p>
+        </p:txBody>
+      </p:sp>
+      <p:sp>
+        <p:nvSpPr>
+          <p:cNvPr id="8" name="TextBox 7">
+            <a:extLst>
+              <a:ext uri="{FF2B5EF4-FFF2-40B4-BE49-F238E27FC236}">
+                <a16:creationId xmlns:a16="http://schemas.microsoft.com/office/drawing/2014/main" id="{704B36DB-8E57-5FBB-1905-DDDA52FA9495}"/>
+              </a:ext>
+            </a:extLst>
+          </p:cNvPr>
+          <p:cNvSpPr txBox="1"/>
+          <p:nvPr/>
+        </p:nvSpPr>
+        <p:spPr>
+          <a:xfrm>
+            <a:off x="-55245" y="6230719"/>
+            <a:ext cx="12272010" cy="646331"/>
+          </a:xfrm>
+          <a:prstGeom prst="rect">
+            <a:avLst/>
+          </a:prstGeom>
+          <a:noFill/>
+        </p:spPr>
+        <p:txBody>
+          <a:bodyPr wrap="square">
+            <a:spAutoFit/>
+          </a:bodyPr>
+          <a:lstStyle/>
+          <a:p>
+            <a:r>
+              <a:rPr lang="en-HK" altLang="zh-Hans-HK" sz="1200" dirty="0">
+                <a:latin typeface="Times New Roman" panose="02020603050405020304" pitchFamily="18" charset="0"/>
+                <a:cs typeface="Times New Roman" panose="02020603050405020304" pitchFamily="18" charset="0"/>
+              </a:rPr>
+              <a:t>[a] </a:t>
+            </a:r>
+            <a:r>
+              <a:rPr lang="zh-Hans-HK" altLang="en-US" sz="1200" dirty="0">
+                <a:latin typeface="Times New Roman" panose="02020603050405020304" pitchFamily="18" charset="0"/>
+                <a:cs typeface="Times New Roman" panose="02020603050405020304" pitchFamily="18" charset="0"/>
+              </a:rPr>
+              <a:t>Tsz Nam Chan, Pak Lon Ip, Bojian Zhu, Leong Hou U, Dingming Wu, Jianliang Xu, Christian S. Jensen: “Large-scale Spatiotemporal Kernel Density Visualization” ICDE 2025, pages 99-113</a:t>
+            </a:r>
+            <a:r>
+              <a:rPr lang="en-HK" altLang="zh-Hans-HK" sz="1200" dirty="0">
+                <a:latin typeface="Times New Roman" panose="02020603050405020304" pitchFamily="18" charset="0"/>
+                <a:cs typeface="Times New Roman" panose="02020603050405020304" pitchFamily="18" charset="0"/>
+              </a:rPr>
+              <a:t>.</a:t>
+            </a:r>
+          </a:p>
+          <a:p>
+            <a:r>
+              <a:rPr lang="en-HK" altLang="zh-Hans-HK" sz="1200" dirty="0">
+                <a:latin typeface="Times New Roman" panose="02020603050405020304" pitchFamily="18" charset="0"/>
+                <a:cs typeface="Times New Roman" panose="02020603050405020304" pitchFamily="18" charset="0"/>
+              </a:rPr>
+              <a:t>[b] Yue Zhong*, Tsz Nam Chan, Leong Hou U, </a:t>
+            </a:r>
+            <a:r>
+              <a:rPr lang="en-HK" altLang="zh-Hans-HK" sz="1200" dirty="0" err="1">
+                <a:latin typeface="Times New Roman" panose="02020603050405020304" pitchFamily="18" charset="0"/>
+                <a:cs typeface="Times New Roman" panose="02020603050405020304" pitchFamily="18" charset="0"/>
+              </a:rPr>
+              <a:t>Dingming</a:t>
+            </a:r>
+            <a:r>
+              <a:rPr lang="en-HK" altLang="zh-Hans-HK" sz="1200" dirty="0">
+                <a:latin typeface="Times New Roman" panose="02020603050405020304" pitchFamily="18" charset="0"/>
+                <a:cs typeface="Times New Roman" panose="02020603050405020304" pitchFamily="18" charset="0"/>
+              </a:rPr>
+              <a:t> Wu, Wei Tu, </a:t>
+            </a:r>
+            <a:r>
+              <a:rPr lang="en-HK" altLang="zh-Hans-HK" sz="1200" dirty="0" err="1">
+                <a:latin typeface="Times New Roman" panose="02020603050405020304" pitchFamily="18" charset="0"/>
+                <a:cs typeface="Times New Roman" panose="02020603050405020304" pitchFamily="18" charset="0"/>
+              </a:rPr>
+              <a:t>Ruisheng</a:t>
+            </a:r>
+            <a:r>
+              <a:rPr lang="en-HK" altLang="zh-Hans-HK" sz="1200" dirty="0">
+                <a:latin typeface="Times New Roman" panose="02020603050405020304" pitchFamily="18" charset="0"/>
+                <a:cs typeface="Times New Roman" panose="02020603050405020304" pitchFamily="18" charset="0"/>
+              </a:rPr>
+              <a:t> Wang, Joshua </a:t>
+            </a:r>
+            <a:r>
+              <a:rPr lang="en-HK" altLang="zh-Hans-HK" sz="1200" dirty="0" err="1">
+                <a:latin typeface="Times New Roman" panose="02020603050405020304" pitchFamily="18" charset="0"/>
+                <a:cs typeface="Times New Roman" panose="02020603050405020304" pitchFamily="18" charset="0"/>
+              </a:rPr>
+              <a:t>Zhexue</a:t>
+            </a:r>
+            <a:r>
+              <a:rPr lang="en-HK" altLang="zh-Hans-HK" sz="1200" dirty="0">
+                <a:latin typeface="Times New Roman" panose="02020603050405020304" pitchFamily="18" charset="0"/>
+                <a:cs typeface="Times New Roman" panose="02020603050405020304" pitchFamily="18" charset="0"/>
+              </a:rPr>
+              <a:t> Huang: “A Fast and Accurate Block Compression Solution for Spatiotemporal Kernel Density Visualization” SIGKDD 2025, pages 4098-4109. </a:t>
+            </a:r>
+            <a:endParaRPr lang="zh-Hans-HK" altLang="en-US" sz="1200" dirty="0">
+              <a:latin typeface="Times New Roman" panose="02020603050405020304" pitchFamily="18" charset="0"/>
+              <a:cs typeface="Times New Roman" panose="02020603050405020304" pitchFamily="18" charset="0"/>
+            </a:endParaRPr>
           </a:p>
         </p:txBody>
       </p:sp>

--- a/publication/PAKDD2026_AI_forum.pptx
+++ b/publication/PAKDD2026_AI_forum.pptx
@@ -131,6 +131,7 @@
 <file path=ppt/revisionInfo.xml><?xml version="1.0" encoding="utf-8"?>
 <p1510:revInfo xmlns:a="http://schemas.openxmlformats.org/drawingml/2006/main" xmlns:r="http://schemas.openxmlformats.org/officeDocument/2006/relationships" xmlns:p1510="http://schemas.microsoft.com/office/powerpoint/2015/10/main">
   <p1510:revLst>
+    <p1510:client id="{C2C175FD-4A73-4FC7-A3B8-B7B5DB992424}" v="2" dt="2026-06-08T15:00:32.939"/>
     <p1510:client id="{D3F187A2-46EC-4E26-B22E-4E263A09E9EA}" v="5" dt="2026-06-08T14:49:19.115"/>
   </p1510:revLst>
 </p1510:revInfo>
@@ -141,7 +142,7 @@
   <pc:docChgLst>
     <pc:chgData name="Tsz Nam Chan" userId="d72bc0ce159372cc" providerId="LiveId" clId="{7EA772CB-F43F-45EA-8D4F-488304E9E5E6}"/>
     <pc:docChg chg="modSld">
-      <pc:chgData name="Tsz Nam Chan" userId="d72bc0ce159372cc" providerId="LiveId" clId="{7EA772CB-F43F-45EA-8D4F-488304E9E5E6}" dt="2026-06-08T14:50:00.523" v="44" actId="1036"/>
+      <pc:chgData name="Tsz Nam Chan" userId="d72bc0ce159372cc" providerId="LiveId" clId="{7EA772CB-F43F-45EA-8D4F-488304E9E5E6}" dt="2026-06-08T15:01:39.522" v="75" actId="20577"/>
       <pc:docMkLst>
         <pc:docMk/>
       </pc:docMkLst>
@@ -161,7 +162,7 @@
         </pc:spChg>
       </pc:sldChg>
       <pc:sldChg chg="addSp modSp mod">
-        <pc:chgData name="Tsz Nam Chan" userId="d72bc0ce159372cc" providerId="LiveId" clId="{7EA772CB-F43F-45EA-8D4F-488304E9E5E6}" dt="2026-06-08T14:50:00.523" v="44" actId="1036"/>
+        <pc:chgData name="Tsz Nam Chan" userId="d72bc0ce159372cc" providerId="LiveId" clId="{7EA772CB-F43F-45EA-8D4F-488304E9E5E6}" dt="2026-06-08T15:01:39.522" v="75" actId="20577"/>
         <pc:sldMkLst>
           <pc:docMk/>
           <pc:sldMk cId="2252278989" sldId="263"/>
@@ -183,7 +184,7 @@
           </ac:spMkLst>
         </pc:spChg>
         <pc:spChg chg="add mod">
-          <ac:chgData name="Tsz Nam Chan" userId="d72bc0ce159372cc" providerId="LiveId" clId="{7EA772CB-F43F-45EA-8D4F-488304E9E5E6}" dt="2026-06-08T14:50:00.523" v="44" actId="1036"/>
+          <ac:chgData name="Tsz Nam Chan" userId="d72bc0ce159372cc" providerId="LiveId" clId="{7EA772CB-F43F-45EA-8D4F-488304E9E5E6}" dt="2026-06-08T15:01:39.522" v="75" actId="20577"/>
           <ac:spMkLst>
             <pc:docMk/>
             <pc:sldMk cId="2252278989" sldId="263"/>
@@ -9925,8 +9926,8 @@
           </a:p>
         </p:txBody>
       </p:sp>
-      <mc:AlternateContent xmlns:mc="http://schemas.openxmlformats.org/markup-compatibility/2006">
-        <mc:Choice xmlns:a14="http://schemas.microsoft.com/office/drawing/2010/main" Requires="a14">
+      <mc:AlternateContent xmlns:mc="http://schemas.openxmlformats.org/markup-compatibility/2006" xmlns:a14="http://schemas.microsoft.com/office/drawing/2010/main">
+        <mc:Choice Requires="a14">
           <p:sp>
             <p:nvSpPr>
               <p:cNvPr id="3" name="Content Placeholder 2">
@@ -10272,14 +10273,7 @@
                         <a:latin typeface="Cambria Math" panose="02040503050406030204" pitchFamily="18" charset="0"/>
                         <a:cs typeface="Times New Roman" panose="02020603050405020304" pitchFamily="18" charset="0"/>
                       </a:rPr>
-                      <m:t>𝑌</m:t>
-                    </m:r>
-                    <m:r>
-                      <a:rPr lang="en-HK" altLang="zh-Hans-HK" b="0" i="1" smtClean="0">
-                        <a:latin typeface="Cambria Math" panose="02040503050406030204" pitchFamily="18" charset="0"/>
-                        <a:cs typeface="Times New Roman" panose="02020603050405020304" pitchFamily="18" charset="0"/>
-                      </a:rPr>
-                      <m:t>𝑛</m:t>
+                      <m:t>𝑌𝑛</m:t>
                     </m:r>
                     <m:r>
                       <a:rPr lang="en-HK" altLang="zh-Hans-HK" b="0" i="1" smtClean="0">
@@ -10325,7 +10319,7 @@
             </p:txBody>
           </p:sp>
         </mc:Choice>
-        <mc:Fallback>
+        <mc:Fallback xmlns="">
           <p:sp>
             <p:nvSpPr>
               <p:cNvPr id="3" name="Content Placeholder 2">
@@ -10990,21 +10984,49 @@
           <a:p>
             <a:r>
               <a:rPr lang="en-HK" altLang="zh-Hans-HK" sz="1200" dirty="0">
-                <a:latin typeface="Times New Roman" panose="02020603050405020304" pitchFamily="18" charset="0"/>
+                <a:latin typeface="Times" panose="02020603050405020304" pitchFamily="18" charset="0"/>
                 <a:cs typeface="Times New Roman" panose="02020603050405020304" pitchFamily="18" charset="0"/>
               </a:rPr>
               <a:t>[a] </a:t>
             </a:r>
             <a:r>
               <a:rPr lang="zh-Hans-HK" altLang="en-US" sz="1200" dirty="0">
-                <a:latin typeface="Times New Roman" panose="02020603050405020304" pitchFamily="18" charset="0"/>
+                <a:latin typeface="Times" panose="02020603050405020304" pitchFamily="18" charset="0"/>
                 <a:cs typeface="Times New Roman" panose="02020603050405020304" pitchFamily="18" charset="0"/>
               </a:rPr>
-              <a:t>Tsz Nam Chan, Pak Lon Ip, Bojian Zhu, Leong Hou U, Dingming Wu, Jianliang Xu, Christian S. Jensen: “Large-scale Spatiotemporal Kernel Density Visualization” ICDE 2025, pages 99-113</a:t>
+              <a:t>Tsz Nam Chan, Pak Lon Ip, Bojian Zhu, Leong Hou U, Dingming Wu, Jianliang Xu, Christian S. Jensen: </a:t>
             </a:r>
             <a:r>
               <a:rPr lang="en-HK" altLang="zh-Hans-HK" sz="1200" dirty="0">
-                <a:latin typeface="Times New Roman" panose="02020603050405020304" pitchFamily="18" charset="0"/>
+                <a:latin typeface="Times" panose="02020603050405020304" pitchFamily="18" charset="0"/>
+                <a:cs typeface="Times New Roman" panose="02020603050405020304" pitchFamily="18" charset="0"/>
+              </a:rPr>
+              <a:t>“</a:t>
+            </a:r>
+            <a:r>
+              <a:rPr lang="zh-Hans-HK" altLang="en-US" sz="1200" dirty="0">
+                <a:latin typeface="Times" panose="02020603050405020304" pitchFamily="18" charset="0"/>
+                <a:cs typeface="Times New Roman" panose="02020603050405020304" pitchFamily="18" charset="0"/>
+              </a:rPr>
+              <a:t>Large-scale Spatiotemporal Kernel Density Visualization</a:t>
+            </a:r>
+            <a:r>
+              <a:rPr lang="en-HK" altLang="zh-Hans-HK" sz="1200" dirty="0">
+                <a:latin typeface="Times" panose="02020603050405020304" pitchFamily="18" charset="0"/>
+                <a:cs typeface="Times New Roman" panose="02020603050405020304" pitchFamily="18" charset="0"/>
+              </a:rPr>
+              <a:t>”</a:t>
+            </a:r>
+            <a:r>
+              <a:rPr lang="zh-Hans-HK" altLang="en-US" sz="1200" dirty="0">
+                <a:latin typeface="Times" panose="02020603050405020304" pitchFamily="18" charset="0"/>
+                <a:cs typeface="Times New Roman" panose="02020603050405020304" pitchFamily="18" charset="0"/>
+              </a:rPr>
+              <a:t> ICDE 2025, pages 99-113</a:t>
+            </a:r>
+            <a:r>
+              <a:rPr lang="en-HK" altLang="zh-Hans-HK" sz="1200" dirty="0">
+                <a:latin typeface="Times" panose="02020603050405020304" pitchFamily="18" charset="0"/>
                 <a:cs typeface="Times New Roman" panose="02020603050405020304" pitchFamily="18" charset="0"/>
               </a:rPr>
               <a:t>.</a:t>
@@ -11013,55 +11035,62 @@
           <a:p>
             <a:r>
               <a:rPr lang="en-HK" altLang="zh-Hans-HK" sz="1200" dirty="0">
-                <a:latin typeface="Times New Roman" panose="02020603050405020304" pitchFamily="18" charset="0"/>
+                <a:latin typeface="Times" panose="02020603050405020304" pitchFamily="18" charset="0"/>
                 <a:cs typeface="Times New Roman" panose="02020603050405020304" pitchFamily="18" charset="0"/>
               </a:rPr>
               <a:t>[b] Yue Zhong*, Tsz Nam Chan, Leong Hou U, </a:t>
             </a:r>
             <a:r>
               <a:rPr lang="en-HK" altLang="zh-Hans-HK" sz="1200" dirty="0" err="1">
-                <a:latin typeface="Times New Roman" panose="02020603050405020304" pitchFamily="18" charset="0"/>
+                <a:latin typeface="Times" panose="02020603050405020304" pitchFamily="18" charset="0"/>
                 <a:cs typeface="Times New Roman" panose="02020603050405020304" pitchFamily="18" charset="0"/>
               </a:rPr>
               <a:t>Dingming</a:t>
             </a:r>
             <a:r>
               <a:rPr lang="en-HK" altLang="zh-Hans-HK" sz="1200" dirty="0">
-                <a:latin typeface="Times New Roman" panose="02020603050405020304" pitchFamily="18" charset="0"/>
+                <a:latin typeface="Times" panose="02020603050405020304" pitchFamily="18" charset="0"/>
                 <a:cs typeface="Times New Roman" panose="02020603050405020304" pitchFamily="18" charset="0"/>
               </a:rPr>
               <a:t> Wu, Wei Tu, </a:t>
             </a:r>
             <a:r>
               <a:rPr lang="en-HK" altLang="zh-Hans-HK" sz="1200" dirty="0" err="1">
-                <a:latin typeface="Times New Roman" panose="02020603050405020304" pitchFamily="18" charset="0"/>
+                <a:latin typeface="Times" panose="02020603050405020304" pitchFamily="18" charset="0"/>
                 <a:cs typeface="Times New Roman" panose="02020603050405020304" pitchFamily="18" charset="0"/>
               </a:rPr>
               <a:t>Ruisheng</a:t>
             </a:r>
             <a:r>
               <a:rPr lang="en-HK" altLang="zh-Hans-HK" sz="1200" dirty="0">
-                <a:latin typeface="Times New Roman" panose="02020603050405020304" pitchFamily="18" charset="0"/>
+                <a:latin typeface="Times" panose="02020603050405020304" pitchFamily="18" charset="0"/>
                 <a:cs typeface="Times New Roman" panose="02020603050405020304" pitchFamily="18" charset="0"/>
               </a:rPr>
               <a:t> Wang, Joshua </a:t>
             </a:r>
             <a:r>
               <a:rPr lang="en-HK" altLang="zh-Hans-HK" sz="1200" dirty="0" err="1">
-                <a:latin typeface="Times New Roman" panose="02020603050405020304" pitchFamily="18" charset="0"/>
+                <a:latin typeface="Times" panose="02020603050405020304" pitchFamily="18" charset="0"/>
                 <a:cs typeface="Times New Roman" panose="02020603050405020304" pitchFamily="18" charset="0"/>
               </a:rPr>
               <a:t>Zhexue</a:t>
             </a:r>
             <a:r>
               <a:rPr lang="en-HK" altLang="zh-Hans-HK" sz="1200" dirty="0">
-                <a:latin typeface="Times New Roman" panose="02020603050405020304" pitchFamily="18" charset="0"/>
+                <a:latin typeface="Times" panose="02020603050405020304" pitchFamily="18" charset="0"/>
                 <a:cs typeface="Times New Roman" panose="02020603050405020304" pitchFamily="18" charset="0"/>
               </a:rPr>
-              <a:t> Huang: “A Fast and Accurate Block Compression Solution for Spatiotemporal Kernel Density Visualization” SIGKDD 2025, pages 4098-4109. </a:t>
+              <a:t> Huang: “A Fast and Accurate Block Compression Solution for Spatiotemporal Kernel Density Visualization” SIGKDD 2025, pages 4098-4109. (* represents </a:t>
+            </a:r>
+            <a:r>
+              <a:rPr lang="en-HK" altLang="zh-Hans-HK" sz="1200">
+                <a:latin typeface="Times" panose="02020603050405020304" pitchFamily="18" charset="0"/>
+                <a:cs typeface="Times New Roman" panose="02020603050405020304" pitchFamily="18" charset="0"/>
+              </a:rPr>
+              <a:t>my student.)</a:t>
             </a:r>
             <a:endParaRPr lang="zh-Hans-HK" altLang="en-US" sz="1200" dirty="0">
-              <a:latin typeface="Times New Roman" panose="02020603050405020304" pitchFamily="18" charset="0"/>
+              <a:latin typeface="Times" panose="02020603050405020304" pitchFamily="18" charset="0"/>
               <a:cs typeface="Times New Roman" panose="02020603050405020304" pitchFamily="18" charset="0"/>
             </a:endParaRPr>
           </a:p>
